--- a/media/exports/reports/2026-03/overtime.pptx
+++ b/media/exports/reports/2026-03/overtime.pptx
@@ -226,58 +226,58 @@
                 <c:formatCode>0.0"%";[Red](0.0"%")</c:formatCode>
                 <c:ptCount val="18"/>
                 <c:pt idx="0">
-                  <c:v>1.5</c:v>
+                  <c:v>1.6</c:v>
                 </c:pt>
                 <c:pt idx="1">
-                  <c:v>1.3</c:v>
+                  <c:v>2.7</c:v>
                 </c:pt>
                 <c:pt idx="2">
-                  <c:v>1.9</c:v>
+                  <c:v>2.2</c:v>
                 </c:pt>
                 <c:pt idx="3">
-                  <c:v>2.3</c:v>
+                  <c:v>3.0</c:v>
                 </c:pt>
                 <c:pt idx="4">
-                  <c:v>2.8</c:v>
+                  <c:v>4.6</c:v>
                 </c:pt>
                 <c:pt idx="5">
-                  <c:v>2.4</c:v>
+                  <c:v>4.4</c:v>
                 </c:pt>
                 <c:pt idx="6">
                   <c:v>3.6</c:v>
                 </c:pt>
                 <c:pt idx="7">
-                  <c:v>2.6</c:v>
+                  <c:v>3.7</c:v>
                 </c:pt>
                 <c:pt idx="8">
                   <c:v>2.8</c:v>
                 </c:pt>
                 <c:pt idx="9">
-                  <c:v>2.4</c:v>
+                  <c:v>3.3</c:v>
                 </c:pt>
                 <c:pt idx="10">
-                  <c:v>4.6</c:v>
+                  <c:v>3.3</c:v>
                 </c:pt>
                 <c:pt idx="11">
-                  <c:v>3.0</c:v>
+                  <c:v>3.7</c:v>
                 </c:pt>
                 <c:pt idx="12">
-                  <c:v>4.0</c:v>
+                  <c:v>3.9</c:v>
                 </c:pt>
                 <c:pt idx="13">
-                  <c:v>3.9</c:v>
+                  <c:v>3.8</c:v>
                 </c:pt>
                 <c:pt idx="14">
-                  <c:v>3.5</c:v>
+                  <c:v>7.7</c:v>
                 </c:pt>
                 <c:pt idx="15">
-                  <c:v>3.8</c:v>
+                  <c:v>3.1</c:v>
                 </c:pt>
                 <c:pt idx="16">
-                  <c:v>5.8</c:v>
+                  <c:v>4.2</c:v>
                 </c:pt>
                 <c:pt idx="17">
-                  <c:v>5.6</c:v>
+                  <c:v>4.2</c:v>
                 </c:pt>
               </c:numCache>
             </c:numRef>
@@ -326,7 +326,7 @@
         <c:axId val="-2100718248"/>
         <c:scaling>
           <c:orientation val="minMax"/>
-          <c:max val="8.0"/>
+          <c:max val="10.0"/>
           <c:min val="0.0"/>
         </c:scaling>
         <c:delete val="0"/>
@@ -458,10 +458,10 @@
               <c:strCache>
                 <c:ptCount val="4"/>
                 <c:pt idx="0">
-                  <c:v>Short-staffed</c:v>
+                  <c:v>Paperwork and quotes</c:v>
                 </c:pt>
                 <c:pt idx="1">
-                  <c:v>Paperwork and quotes</c:v>
+                  <c:v>Short-staffed</c:v>
                 </c:pt>
                 <c:pt idx="2">
                   <c:v>Installation ran over</c:v>
@@ -479,16 +479,16 @@
                 <c:formatCode>#,##0;[Red](#,##0)</c:formatCode>
                 <c:ptCount val="4"/>
                 <c:pt idx="0">
-                  <c:v>4.5</c:v>
+                  <c:v>1.5</c:v>
                 </c:pt>
                 <c:pt idx="1">
-                  <c:v>8.0</c:v>
+                  <c:v>6.5</c:v>
                 </c:pt>
                 <c:pt idx="2">
-                  <c:v>11.5</c:v>
+                  <c:v>18.5</c:v>
                 </c:pt>
                 <c:pt idx="3">
-                  <c:v>39.5</c:v>
+                  <c:v>22.0</c:v>
                 </c:pt>
               </c:numCache>
             </c:numRef>
@@ -552,7 +552,7 @@
       <c:valAx>
         <c:axId val="-2113994440"/>
         <c:scaling>
-          <c:max val="45.425"/>
+          <c:max val="25.299999999999997"/>
           <c:min val="0.0"/>
         </c:scaling>
         <c:delete/>
@@ -680,25 +680,25 @@
               <c:strCache>
                 <c:ptCount val="7"/>
                 <c:pt idx="0">
-                  <c:v>Technician T6</c:v>
+                  <c:v>Technician T4</c:v>
                 </c:pt>
                 <c:pt idx="1">
+                  <c:v>Technician T7</c:v>
+                </c:pt>
+                <c:pt idx="2">
+                  <c:v>Technician T5</c:v>
+                </c:pt>
+                <c:pt idx="3">
                   <c:v>Technician T2</c:v>
                 </c:pt>
-                <c:pt idx="2">
-                  <c:v>Technician T4</c:v>
+                <c:pt idx="4">
+                  <c:v>Technician T1</c:v>
                 </c:pt>
-                <c:pt idx="3">
-                  <c:v>Technician T5</c:v>
-                </c:pt>
-                <c:pt idx="4">
+                <c:pt idx="5">
                   <c:v>Technician T3</c:v>
                 </c:pt>
-                <c:pt idx="5">
-                  <c:v>Technician T1</c:v>
-                </c:pt>
                 <c:pt idx="6">
-                  <c:v>Technician T7</c:v>
+                  <c:v>Technician T6</c:v>
                 </c:pt>
               </c:strCache>
             </c:strRef>
@@ -710,25 +710,25 @@
                 <c:formatCode>#,##0;[Red](#,##0)</c:formatCode>
                 <c:ptCount val="7"/>
                 <c:pt idx="0">
-                  <c:v>2.0</c:v>
+                  <c:v>2.5</c:v>
                 </c:pt>
                 <c:pt idx="1">
-                  <c:v>2.5</c:v>
+                  <c:v>3.5</c:v>
                 </c:pt>
                 <c:pt idx="2">
-                  <c:v>6.5</c:v>
+                  <c:v>4.0</c:v>
                 </c:pt>
                 <c:pt idx="3">
-                  <c:v>11.0</c:v>
+                  <c:v>4.0</c:v>
                 </c:pt>
                 <c:pt idx="4">
-                  <c:v>13.0</c:v>
+                  <c:v>8.5</c:v>
                 </c:pt>
                 <c:pt idx="5">
-                  <c:v>13.5</c:v>
+                  <c:v>10.0</c:v>
                 </c:pt>
                 <c:pt idx="6">
-                  <c:v>15.0</c:v>
+                  <c:v>16.0</c:v>
                 </c:pt>
               </c:numCache>
             </c:numRef>
@@ -792,7 +792,7 @@
       <c:valAx>
         <c:axId val="-2113994440"/>
         <c:scaling>
-          <c:max val="17.25"/>
+          <c:max val="18.4"/>
           <c:min val="0.0"/>
         </c:scaling>
         <c:delete/>
@@ -1289,7 +1289,7 @@
           <a:lstStyle/>
           <a:p>
             <a:r>
-              <a:t>Where is overtime creeping up, and why?. Overtime, March: 5.6%; Overtime hours, March: 63.5 h; March last year: 2.4%. Technicians worked 63.5 h of overtime in March, 5.6% of ordinary hours (target under 5.0%), against 5.8% in February. Over the last year it has gone from 2.4% to 5.6%. After-hours call-out is the main reason: 39.5 h, 62.2% of the overtime. Technician T7 carried the most (15.0 h). Above target by 6.9 h.</a:t>
+              <a:t>Where is overtime creeping up, and why?. Overtime, March: 4.2%; Overtime hours, March: 48.5 h; March last year: 4.4%. Technicians worked 48.5 h of overtime in March, 4.2% of ordinary hours (target under 5.0%), against 4.2% in February. Over the last year it has gone from 4.4% to 4.2%. After-hours call-out is the main reason: 22.0 h, 45.4% of the overtime. Technician T6 carried the most (16.0 h).</a:t>
             </a:r>
           </a:p>
         </p:txBody>
@@ -4844,7 +4844,7 @@
                 </a:solidFill>
                 <a:latin typeface="Roboto"/>
               </a:rPr>
-              <a:t>Data retrieved 2pm, Tue 6 Oct 2026 · Generated 8 Oct 2026, 6:29pm · Sample data · Made with Python (python-pptx)</a:t>
+              <a:t>Data retrieved 2pm, Tue 6 Oct 2026 · Generated 8 Oct 2026, 11:41pm · Sample data · Made with Python (python-pptx)</a:t>
             </a:r>
           </a:p>
         </p:txBody>
@@ -5186,11 +5186,11 @@
             <a:r>
               <a:rPr sz="2200" b="1">
                 <a:solidFill>
-                  <a:srgbClr val="8A6D3B"/>
+                  <a:srgbClr val="2F7A5D"/>
                 </a:solidFill>
                 <a:latin typeface="Roboto"/>
               </a:rPr>
-              <a:t>5.6%</a:t>
+              <a:t>4.2%</a:t>
             </a:r>
           </a:p>
         </p:txBody>
@@ -5356,7 +5356,7 @@
                 </a:solidFill>
                 <a:latin typeface="Roboto"/>
               </a:rPr>
-              <a:t>63.5 h</a:t>
+              <a:t>48.5 h</a:t>
             </a:r>
           </a:p>
         </p:txBody>
@@ -5395,7 +5395,7 @@
                 </a:solidFill>
                 <a:latin typeface="Roboto"/>
               </a:rPr>
-              <a:t>February 59.0 h</a:t>
+              <a:t>February 43.5 h</a:t>
             </a:r>
           </a:p>
         </p:txBody>
@@ -5522,7 +5522,7 @@
                 </a:solidFill>
                 <a:latin typeface="Roboto"/>
               </a:rPr>
-              <a:t>2.4%</a:t>
+              <a:t>4.4%</a:t>
             </a:r>
           </a:p>
         </p:txBody>
@@ -5561,7 +5561,7 @@
                 </a:solidFill>
                 <a:latin typeface="Roboto"/>
               </a:rPr>
-              <a:t>26.0 h of overtime</a:t>
+              <a:t>40.5 h of overtime</a:t>
             </a:r>
           </a:p>
         </p:txBody>
@@ -5706,7 +5706,7 @@
                 </a:solidFill>
                 <a:latin typeface="Roboto"/>
               </a:rPr>
-              <a:t>Technicians worked 63.5 h of overtime in March, 5.6% of ordinary hours (target under 5.0%), against 5.8% in February. Over the last year it has gone from 2.4% to 5.6%.</a:t>
+              <a:t>Technicians worked 48.5 h of overtime in March, 4.2% of ordinary hours (target under 5.0%), against 4.2% in February. Over the last year it has gone from 4.4% to 4.2%.</a:t>
             </a:r>
           </a:p>
         </p:txBody>
@@ -5833,7 +5833,7 @@
                 </a:solidFill>
                 <a:latin typeface="Roboto"/>
               </a:rPr>
-              <a:t>After-hours call-out is the main reason: 39.5 h, 62.2% of the overtime. Technician T7 carried the most (15.0 h). Above target by 6.9 h.</a:t>
+              <a:t>After-hours call-out is the main reason: 22.0 h, 45.4% of the overtime. Technician T6 carried the most (16.0 h).</a:t>
             </a:r>
           </a:p>
         </p:txBody>
@@ -5911,7 +5911,7 @@
                 </a:solidFill>
                 <a:latin typeface="Roboto"/>
               </a:rPr>
-              <a:t>Data retrieved 2pm, Tue 6 Oct 2026 · Generated 8 Oct 2026, 6:29pm · Sample data · Made with Python (python-pptx)</a:t>
+              <a:t>Data retrieved 2pm, Tue 6 Oct 2026 · Generated 8 Oct 2026, 11:41pm · Sample data · Made with Python (python-pptx)</a:t>
             </a:r>
           </a:p>
         </p:txBody>
@@ -6226,7 +6226,7 @@
                 </a:solidFill>
                 <a:latin typeface="Roboto"/>
               </a:rPr>
-              <a:t>Data retrieved 2pm, Tue 6 Oct 2026 · Generated 8 Oct 2026, 6:29pm · Sample data · Made with Python (python-pptx)</a:t>
+              <a:t>Data retrieved 2pm, Tue 6 Oct 2026 · Generated 8 Oct 2026, 11:41pm · Sample data · Made with Python (python-pptx)</a:t>
             </a:r>
           </a:p>
         </p:txBody>
@@ -6541,7 +6541,7 @@
                 </a:solidFill>
                 <a:latin typeface="Roboto"/>
               </a:rPr>
-              <a:t>Data retrieved 2pm, Tue 6 Oct 2026 · Generated 8 Oct 2026, 6:29pm · Sample data · Made with Python (python-pptx)</a:t>
+              <a:t>Data retrieved 2pm, Tue 6 Oct 2026 · Generated 8 Oct 2026, 11:41pm · Sample data · Made with Python (python-pptx)</a:t>
             </a:r>
           </a:p>
         </p:txBody>

--- a/media/exports/reports/2026-03/overtime.pptx
+++ b/media/exports/reports/2026-03/overtime.pptx
@@ -1219,7 +1219,7 @@
           <a:lstStyle/>
           <a:p>
             <a:r>
-              <a:t>Where is overtime creeping up, and why?. Sample Electrical &amp; Air Pty Ltd. Period: March 2026. Each technician's paid hours, day by day: ordinary hours and overtime, with the main reason for the overtime.</a:t>
+              <a:t>Where is overtime creeping up, and why?. Sample Electrical &amp; Air Pty Ltd. Period: March 2026. In short: Overtime was 4.2% of ordinary hours in March (target under 5.0%), up from 4.4% a year earlier. Each technician's paid hours, day by day: ordinary hours and overtime, with the main reason for the overtime.</a:t>
             </a:r>
           </a:p>
         </p:txBody>
@@ -4679,7 +4679,7 @@
                 </a:solidFill>
                 <a:latin typeface="Roboto"/>
               </a:rPr>
-              <a:t>Period: March 2026. Each technician's paid hours, day by day: ordinary hours and overtime, with the main reason for the overtime.</a:t>
+              <a:t>Period: March 2026. In short: Overtime was 4.2% of ordinary hours in March (target under 5.0%), up from 4.4% a year earlier. Each technician's paid hours, day by day: ordinary hours and overtime, with the main reason for the overtime.</a:t>
             </a:r>
           </a:p>
         </p:txBody>
@@ -4844,7 +4844,7 @@
                 </a:solidFill>
                 <a:latin typeface="Roboto"/>
               </a:rPr>
-              <a:t>Data retrieved 2pm, Tue 6 Oct 2026 · Generated 8 Oct 2026, 11:41pm · Sample data · Made with Python (python-pptx)</a:t>
+              <a:t>Data retrieved 2pm, Tue 6 Oct 2026 · Generated 10 Oct 2026, 9:55pm · Sample data · Made with Python (python-pptx)</a:t>
             </a:r>
           </a:p>
         </p:txBody>
@@ -5911,7 +5911,7 @@
                 </a:solidFill>
                 <a:latin typeface="Roboto"/>
               </a:rPr>
-              <a:t>Data retrieved 2pm, Tue 6 Oct 2026 · Generated 8 Oct 2026, 11:41pm · Sample data · Made with Python (python-pptx)</a:t>
+              <a:t>Data retrieved 2pm, Tue 6 Oct 2026 · Generated 10 Oct 2026, 9:55pm · Sample data · Made with Python (python-pptx)</a:t>
             </a:r>
           </a:p>
         </p:txBody>
@@ -6226,7 +6226,7 @@
                 </a:solidFill>
                 <a:latin typeface="Roboto"/>
               </a:rPr>
-              <a:t>Data retrieved 2pm, Tue 6 Oct 2026 · Generated 8 Oct 2026, 11:41pm · Sample data · Made with Python (python-pptx)</a:t>
+              <a:t>Data retrieved 2pm, Tue 6 Oct 2026 · Generated 10 Oct 2026, 9:55pm · Sample data · Made with Python (python-pptx)</a:t>
             </a:r>
           </a:p>
         </p:txBody>
@@ -6541,7 +6541,7 @@
                 </a:solidFill>
                 <a:latin typeface="Roboto"/>
               </a:rPr>
-              <a:t>Data retrieved 2pm, Tue 6 Oct 2026 · Generated 8 Oct 2026, 11:41pm · Sample data · Made with Python (python-pptx)</a:t>
+              <a:t>Data retrieved 2pm, Tue 6 Oct 2026 · Generated 10 Oct 2026, 9:55pm · Sample data · Made with Python (python-pptx)</a:t>
             </a:r>
           </a:p>
         </p:txBody>
